--- a/SDC/教学资料/课件/T4-体系结构设计（二）.pptx
+++ b/SDC/教学资料/课件/T4-体系结构设计（二）.pptx
@@ -15615,7 +15615,7 @@
                 <a:ea typeface="微软雅黑"/>
                 <a:cs typeface="微软雅黑"/>
               </a:rPr>
-              <a:t>模型或提示词一变就重测，公开题只计回归</a:t>
+              <a:t>模型或提示词一变就重测，据题集调过参的题只计回归</a:t>
             </a:r>
           </a:p>
         </p:txBody>

--- a/SDC/教学资料/课件/T4-体系结构设计（二）.pptx
+++ b/SDC/教学资料/课件/T4-体系结构设计（二）.pptx
@@ -1518,6 +1518,11 @@
               <a:t>权衡：定位器少改构造函数，依赖关系从签名上消失。对照见 Fowler《IoC 容器与依赖注入》。</a:t>
             </a:r>
           </a:p>
+          <a:p>
+            <a:r>
+              <a:t>取舍：可选——时间不足时略去，不影响本课重点、后续理解与作业。</a:t>
+            </a:r>
+          </a:p>
         </p:txBody>
       </p:sp>
       <p:sp>
@@ -1613,6 +1618,11 @@
               <a:t>权衡：字段注入少改构造函数；构造函数注入在 new 的时候就能换实现。Autofac 按注册创建接口的实现并传给窗体。材料是 2024 第 8-3 讲第 13–18 页，不涉及具体业务名称。</a:t>
             </a:r>
           </a:p>
+          <a:p>
+            <a:r>
+              <a:t>取舍：可选——时间不足时略去，不影响本课重点、后续理解与作业。</a:t>
+            </a:r>
+          </a:p>
         </p:txBody>
       </p:sp>
       <p:sp>
@@ -2473,6 +2483,11 @@
               <a:t>权衡：第 360 行和第 367 行各自超过代码框一行的宽度，放进框里会把调用折开，所以框里只保留创建和条件。这段是列表查询，不是生成订单那一个事务。</a:t>
             </a:r>
           </a:p>
+          <a:p>
+            <a:r>
+              <a:t>取舍：可选——时间不足时略去，不影响本课重点、后续理解与作业。</a:t>
+            </a:r>
+          </a:p>
         </p:txBody>
       </p:sp>
       <p:sp>
@@ -2568,6 +2583,11 @@
               <a:t>权衡：SQL 映射改语句直接；全映射少写 SQL，迁移和上下文要单独维护。Entity Framework 一侧见 2024 第 8-4 讲第 12–22 页：类与表的映射、用迁移初始化、仓储实现接口。不涉及具体业务名称。</a:t>
             </a:r>
           </a:p>
+          <a:p>
+            <a:r>
+              <a:t>取舍：可选——时间不足时略去，不影响本课重点、后续理解与作业。</a:t>
+            </a:r>
+          </a:p>
         </p:txBody>
       </p:sp>
       <p:sp>
@@ -3280,7 +3300,7 @@
           <a:p>
             <a:r>
               <a:rPr lang="zh-CN" dirty="0"/>
-              <a:t>权衡：E2-00 的取舍理由写在它的决策记录里；E4-00 在实验里比较策略模式与只提取方法两种做法。</a:t>
+              <a:t>权衡：E2-00 的取舍理由写在它的决策记录里；三路分支与策略的取舍在 E4 实验中比较。</a:t>
             </a:r>
           </a:p>
         </p:txBody>
@@ -17417,7 +17437,7 @@
                 <a:latin typeface="微软雅黑"/>
                 <a:ea typeface="微软雅黑"/>
               </a:rPr>
-              <a:t>E4-00 改成策略后，</a:t>
+              <a:t>若把三路分支改成策略，</a:t>
             </a:r>
             <a:br>
               <a:rPr lang="zh-CN" sz="2000">
